--- a/calvary_analysis/decks/executive_one_pager.pptx
+++ b/calvary_analysis/decks/executive_one_pager.pptx
@@ -107,7 +107,7 @@
   <p:extLst>
     <p:ext uri="{521415D9-36F7-43E2-AB2F-B90AF26B5E84}">
       <p14:sectionLst xmlns:p14="http://schemas.microsoft.com/office/powerpoint/2010/main">
-        <p14:section name="One page" id="{25194d08-c8cb-e511-5cef-1f3194328263}">
+        <p14:section name="One page" id="{e6b6735f-29cd-09e9-6bf3-5a79741089c0}">
           <p14:sldIdLst>
             <p14:sldId id="256"/>
           </p14:sldIdLst>

--- a/calvary_analysis/decks/executive_one_pager.pptx
+++ b/calvary_analysis/decks/executive_one_pager.pptx
@@ -107,7 +107,7 @@
   <p:extLst>
     <p:ext uri="{521415D9-36F7-43E2-AB2F-B90AF26B5E84}">
       <p14:sectionLst xmlns:p14="http://schemas.microsoft.com/office/powerpoint/2010/main">
-        <p14:section name="One page" id="{e6b6735f-29cd-09e9-6bf3-5a79741089c0}">
+        <p14:section name="One page" id="{b64f3951-c739-7163-bebf-16d5299dc76e}">
           <p14:sldIdLst>
             <p14:sldId id="256"/>
           </p14:sldIdLst>
@@ -1540,7 +1540,7 @@
                   <a:srgbClr val="1F1B1D"/>
                 </a:solidFill>
               </a:rPr>
-              <a:t>The shape is the issue: three streams, two through TCP, which carries 74% of a $4.1M award base.</a:t>
+              <a:t>The shape is the issue: three streams, two through TCP, which carries 78% of the $4.1M 2024 award base.</a:t>
             </a:r>
             <a:endParaRPr lang="en-US" sz="1100" dirty="0"/>
           </a:p>
@@ -1576,7 +1576,7 @@
                   <a:srgbClr val="1F1B1D"/>
                 </a:solidFill>
               </a:rPr>
-              <a:t>FY25: −$607K, event income −$483K, 4.4 months of cash (7.5 in FY21).</a:t>
+              <a:t>FY25: −$607K and 4.4 months of cash (7.5 in FY21), while event receipts held near $0.5M.</a:t>
             </a:r>
             <a:endParaRPr lang="en-US" sz="1100" dirty="0"/>
           </a:p>
@@ -1593,7 +1593,7 @@
                   <a:srgbClr val="41242F"/>
                 </a:solidFill>
               </a:rPr>
-              <a:t>Clouds: a cut is proposed every spring (restored twice), losing the DHS/TCP contract would cost ~$960K, and Calvary recognized about two-thirds of known award ceilings in FY24–25.</a:t>
+              <a:t>Clouds: a cut is proposed every spring (restored twice, FY27 mostly one-time), losing the DHS/TCP contract would cost about $0.65–1.13M, and the audits show CoC draw-down well below awards.</a:t>
             </a:r>
             <a:endParaRPr lang="en-US" sz="1100" dirty="0"/>
           </a:p>
@@ -1711,7 +1711,7 @@
                   <a:srgbClr val="41242F"/>
                 </a:solidFill>
               </a:rPr>
-              <a:t>Draw every awarded dollar and confirm the DHS and Sisters Rise contracts with TCP (day 30).</a:t>
+              <a:t>Draw every awarded dollar, CoC first, and confirm the DHS and Sisters Rise contracts with TCP (day 30).</a:t>
             </a:r>
             <a:endParaRPr lang="en-US" sz="1100" dirty="0"/>
           </a:p>
@@ -1728,7 +1728,7 @@
                   <a:srgbClr val="41242F"/>
                 </a:solidFill>
               </a:rPr>
-              <a:t>Upgrade current partners to multi-year: GWCF (Health Equity Fund successor), Cafritz (Mar 1 / Jul 1 / Nov 1), Abell, Fowler, United Way NCA, Bank of America (day 45).</a:t>
+              <a:t>Deepen current partners: multi-year asks to Cafritz (Mar 1 / Jul 1 / Nov 1) and Fowler, two GWCF conversations (Health Equity Fund successor, core support), and steward Abell (day 45–60).</a:t>
             </a:r>
             <a:endParaRPr lang="en-US" sz="1100" dirty="0"/>
           </a:p>
@@ -1745,7 +1745,7 @@
                   <a:srgbClr val="41242F"/>
                 </a:solidFill>
               </a:rPr>
-              <a:t>Open foundations that fund Calvary's peers: Clark Charitable ($7.8M to five peers, median $250K), Schattner, Cohen, Bernstein, The Washington Home, and re-engage Many Hands, World Bank CCF and Jane Bancroft Robinson (day 60–90).</a:t>
+              <a:t>Open doors through peers: an introduction to Schattner, which funds four peers and works by invitation, once the peer set is confirmed (day 90).</a:t>
             </a:r>
             <a:endParaRPr lang="en-US" sz="1100" dirty="0"/>
           </a:p>
@@ -1762,7 +1762,7 @@
                   <a:srgbClr val="41242F"/>
                 </a:solidFill>
               </a:rPr>
-              <a:t>Restore the event line and start a major-gifts / DAF program (peers raise 40–50% of filed grants via DAFs, Calvary 25%).</a:t>
+              <a:t>Start a named major-gifts / DAF program (peers raise 40–50% of filed grants via DAFs, Calvary 25%).</a:t>
             </a:r>
             <a:endParaRPr lang="en-US" sz="1100" dirty="0"/>
           </a:p>
@@ -1931,7 +1931,7 @@
                   <a:srgbClr val="1F1B1D"/>
                 </a:solidFill>
               </a:rPr>
-              <a:t>Next come your reactions, then the FY24–25 audits, the TCP subgrant agreements and the FY25 gala calendar, then a working session to turn the eleven Tier 1 targets into assignments.</a:t>
+              <a:t>Next come your reactions, then the FY24–25 audits and the TCP subgrant agreements, then a working session to turn the nine Tier 1 targets into assignments.</a:t>
             </a:r>
             <a:endParaRPr lang="en-US" sz="1100" dirty="0"/>
           </a:p>
@@ -1949,7 +1949,7 @@
                   <a:srgbClr val="1F1B1D"/>
                 </a:solidFill>
               </a:rPr>
-              <a:t>What follows: the leadership deck (22 content slides), the consulting deck (55 content slides), appendix decks A–D, and four reports.</a:t>
+              <a:t>What follows: the leadership deck (22 content slides), the consulting deck (66 slides), appendix decks A–D, and four reports.</a:t>
             </a:r>
             <a:endParaRPr lang="en-US" sz="1100" dirty="0"/>
           </a:p>
@@ -2120,7 +2120,7 @@
 </file>
 
 <file path=ppt/theme/theme1.xml><?xml version="1.0" encoding="utf-8"?>
-<a:theme xmlns:a="http://schemas.openxmlformats.org/drawingml/2006/main" name="Calvary Funding Engagement">
+<a:theme xmlns:a="http://schemas.openxmlformats.org/drawingml/2006/main" name="Office Theme">
   <a:themeElements>
     <a:clrScheme name="Calvary Funding Engagement">
       <a:dk1>
@@ -2160,7 +2160,7 @@
         <a:srgbClr val="8C8488"/>
       </a:folHlink>
     </a:clrScheme>
-    <a:fontScheme name="Calvary Funding Engagement">
+    <a:fontScheme name="Office">
       <a:majorFont>
         <a:latin typeface="Arial"/>
         <a:ea typeface=""/>
